--- a/public/fun/pack/pptx/family/가족소개_02_아이와함께_입춘날마루.pptx
+++ b/public/fun/pack/pptx/family/가족소개_02_아이와함께_입춘날마루.pptx
@@ -3347,7 +3347,7 @@
             <a:r>
               <a:rPr sz="3600" b="1" i="0">
                 <a:solidFill>
-                  <a:srgbClr val="74591B"/>
+                  <a:srgbClr val="72591D"/>
                 </a:solidFill>
               </a:rPr>
               <a:t>우리 가족을 소개합니다</a:t>
@@ -3385,7 +3385,7 @@
             <a:r>
               <a:rPr sz="1700" b="0" i="1">
                 <a:solidFill>
-                  <a:srgbClr val="74591B"/>
+                  <a:srgbClr val="72591D"/>
                 </a:solidFill>
               </a:rPr>
               <a:t>입춘날 마루에 앉아 아이와 한 장</a:t>
@@ -3445,7 +3445,7 @@
     <p:bg>
       <p:bgPr>
         <a:solidFill>
-          <a:srgbClr val="FBF7EE"/>
+          <a:srgbClr val="FCF9F3"/>
         </a:solidFill>
         <a:effectLst/>
       </p:bgPr>
@@ -3474,7 +3474,7 @@
           <a:noFill/>
           <a:ln w="28575">
             <a:solidFill>
-              <a:srgbClr val="C6992F"/>
+              <a:srgbClr val="DFAD3A"/>
             </a:solidFill>
           </a:ln>
         </p:spPr>
@@ -3503,7 +3503,7 @@
           <a:noFill/>
           <a:ln w="9525">
             <a:solidFill>
-              <a:srgbClr val="F5E9CC"/>
+              <a:srgbClr val="F7EDD4"/>
             </a:solidFill>
           </a:ln>
         </p:spPr>
@@ -3545,7 +3545,7 @@
             <a:r>
               <a:rPr sz="3000" b="1" i="0">
                 <a:solidFill>
-                  <a:srgbClr val="74591B"/>
+                  <a:srgbClr val="72591D"/>
                 </a:solidFill>
               </a:rPr>
               <a:t>가족 구성원</a:t>
@@ -3568,11 +3568,11 @@
             <a:avLst/>
           </a:prstGeom>
           <a:solidFill>
-            <a:srgbClr val="F5E9CC"/>
+            <a:srgbClr val="F7EDD4"/>
           </a:solidFill>
           <a:ln w="19050">
             <a:solidFill>
-              <a:srgbClr val="C6992F"/>
+              <a:srgbClr val="DFAD3A"/>
             </a:solidFill>
             <a:prstDash val="dash"/>
           </a:ln>
@@ -3591,7 +3591,7 @@
             <a:r>
               <a:rPr sz="1200" b="0" i="0">
                 <a:solidFill>
-                  <a:srgbClr val="74591B"/>
+                  <a:srgbClr val="72591D"/>
                 </a:solidFill>
               </a:rPr>
               <a:t>사진</a:t>
@@ -3629,7 +3629,7 @@
             <a:r>
               <a:rPr sz="1600" b="1" i="0">
                 <a:solidFill>
-                  <a:srgbClr val="74591B"/>
+                  <a:srgbClr val="72591D"/>
                 </a:solidFill>
               </a:rPr>
               <a:t>아빠</a:t>
@@ -3720,11 +3720,11 @@
             <a:avLst/>
           </a:prstGeom>
           <a:solidFill>
-            <a:srgbClr val="F5E9CC"/>
+            <a:srgbClr val="F7EDD4"/>
           </a:solidFill>
           <a:ln w="19050">
             <a:solidFill>
-              <a:srgbClr val="C6992F"/>
+              <a:srgbClr val="DFAD3A"/>
             </a:solidFill>
             <a:prstDash val="dash"/>
           </a:ln>
@@ -3743,7 +3743,7 @@
             <a:r>
               <a:rPr sz="1200" b="0" i="0">
                 <a:solidFill>
-                  <a:srgbClr val="74591B"/>
+                  <a:srgbClr val="72591D"/>
                 </a:solidFill>
               </a:rPr>
               <a:t>사진</a:t>
@@ -3781,7 +3781,7 @@
             <a:r>
               <a:rPr sz="1600" b="1" i="0">
                 <a:solidFill>
-                  <a:srgbClr val="74591B"/>
+                  <a:srgbClr val="72591D"/>
                 </a:solidFill>
               </a:rPr>
               <a:t>엄마</a:t>
@@ -3872,11 +3872,11 @@
             <a:avLst/>
           </a:prstGeom>
           <a:solidFill>
-            <a:srgbClr val="F5E9CC"/>
+            <a:srgbClr val="F7EDD4"/>
           </a:solidFill>
           <a:ln w="19050">
             <a:solidFill>
-              <a:srgbClr val="C6992F"/>
+              <a:srgbClr val="DFAD3A"/>
             </a:solidFill>
             <a:prstDash val="dash"/>
           </a:ln>
@@ -3895,7 +3895,7 @@
             <a:r>
               <a:rPr sz="1200" b="0" i="0">
                 <a:solidFill>
-                  <a:srgbClr val="74591B"/>
+                  <a:srgbClr val="72591D"/>
                 </a:solidFill>
               </a:rPr>
               <a:t>사진</a:t>
@@ -3933,7 +3933,7 @@
             <a:r>
               <a:rPr sz="1600" b="1" i="0">
                 <a:solidFill>
-                  <a:srgbClr val="74591B"/>
+                  <a:srgbClr val="72591D"/>
                 </a:solidFill>
               </a:rPr>
               <a:t>첫째</a:t>
@@ -4024,11 +4024,11 @@
             <a:avLst/>
           </a:prstGeom>
           <a:solidFill>
-            <a:srgbClr val="F5E9CC"/>
+            <a:srgbClr val="F7EDD4"/>
           </a:solidFill>
           <a:ln w="19050">
             <a:solidFill>
-              <a:srgbClr val="C6992F"/>
+              <a:srgbClr val="DFAD3A"/>
             </a:solidFill>
             <a:prstDash val="dash"/>
           </a:ln>
@@ -4047,7 +4047,7 @@
             <a:r>
               <a:rPr sz="1200" b="0" i="0">
                 <a:solidFill>
-                  <a:srgbClr val="74591B"/>
+                  <a:srgbClr val="72591D"/>
                 </a:solidFill>
               </a:rPr>
               <a:t>사진</a:t>
@@ -4085,7 +4085,7 @@
             <a:r>
               <a:rPr sz="1600" b="1" i="0">
                 <a:solidFill>
-                  <a:srgbClr val="74591B"/>
+                  <a:srgbClr val="72591D"/>
                 </a:solidFill>
               </a:rPr>
               <a:t>둘째</a:t>
@@ -4175,7 +4175,7 @@
     <p:bg>
       <p:bgPr>
         <a:solidFill>
-          <a:srgbClr val="FBF7EE"/>
+          <a:srgbClr val="FCF9F3"/>
         </a:solidFill>
         <a:effectLst/>
       </p:bgPr>
@@ -4204,7 +4204,7 @@
           <a:noFill/>
           <a:ln w="28575">
             <a:solidFill>
-              <a:srgbClr val="C6992F"/>
+              <a:srgbClr val="DFAD3A"/>
             </a:solidFill>
           </a:ln>
         </p:spPr>
@@ -4233,7 +4233,7 @@
           <a:noFill/>
           <a:ln w="9525">
             <a:solidFill>
-              <a:srgbClr val="F5E9CC"/>
+              <a:srgbClr val="F7EDD4"/>
             </a:solidFill>
           </a:ln>
         </p:spPr>
@@ -4275,7 +4275,7 @@
             <a:r>
               <a:rPr sz="3000" b="1" i="0">
                 <a:solidFill>
-                  <a:srgbClr val="74591B"/>
+                  <a:srgbClr val="72591D"/>
                 </a:solidFill>
               </a:rPr>
               <a:t>우리 가족 이야기</a:t>
@@ -4298,7 +4298,7 @@
             <a:avLst/>
           </a:prstGeom>
           <a:solidFill>
-            <a:srgbClr val="F5E9CC"/>
+            <a:srgbClr val="F7EDD4"/>
           </a:solidFill>
           <a:ln>
             <a:noFill/>
@@ -4327,7 +4327,7 @@
             <a:avLst/>
           </a:prstGeom>
           <a:solidFill>
-            <a:srgbClr val="C6992F"/>
+            <a:srgbClr val="DFAD3A"/>
           </a:solidFill>
           <a:ln w="38100">
             <a:solidFill>
@@ -4373,7 +4373,7 @@
             <a:r>
               <a:rPr sz="1600" b="1" i="0">
                 <a:solidFill>
-                  <a:srgbClr val="C6992F"/>
+                  <a:srgbClr val="DFAD3A"/>
                 </a:solidFill>
               </a:rPr>
               <a:t>가족이 된 날</a:t>
@@ -4411,7 +4411,7 @@
             <a:r>
               <a:rPr sz="1800" b="1" i="0">
                 <a:solidFill>
-                  <a:srgbClr val="74591B"/>
+                  <a:srgbClr val="72591D"/>
                 </a:solidFill>
               </a:rPr>
               <a:t>우리의 시작</a:t>
@@ -4472,7 +4472,7 @@
             <a:avLst/>
           </a:prstGeom>
           <a:solidFill>
-            <a:srgbClr val="C6992F"/>
+            <a:srgbClr val="DFAD3A"/>
           </a:solidFill>
           <a:ln w="38100">
             <a:solidFill>
@@ -4518,7 +4518,7 @@
             <a:r>
               <a:rPr sz="1600" b="1" i="0">
                 <a:solidFill>
-                  <a:srgbClr val="C6992F"/>
+                  <a:srgbClr val="DFAD3A"/>
                 </a:solidFill>
               </a:rPr>
               <a:t>아이가 태어난 날</a:t>
@@ -4556,7 +4556,7 @@
             <a:r>
               <a:rPr sz="1800" b="1" i="0">
                 <a:solidFill>
-                  <a:srgbClr val="74591B"/>
+                  <a:srgbClr val="72591D"/>
                 </a:solidFill>
               </a:rPr>
               <a:t>새 식구</a:t>
@@ -4617,7 +4617,7 @@
             <a:avLst/>
           </a:prstGeom>
           <a:solidFill>
-            <a:srgbClr val="C6992F"/>
+            <a:srgbClr val="DFAD3A"/>
           </a:solidFill>
           <a:ln w="38100">
             <a:solidFill>
@@ -4663,7 +4663,7 @@
             <a:r>
               <a:rPr sz="1600" b="1" i="0">
                 <a:solidFill>
-                  <a:srgbClr val="C6992F"/>
+                  <a:srgbClr val="DFAD3A"/>
                 </a:solidFill>
               </a:rPr>
               <a:t>첫 가족 여행</a:t>
@@ -4701,7 +4701,7 @@
             <a:r>
               <a:rPr sz="1800" b="1" i="0">
                 <a:solidFill>
-                  <a:srgbClr val="74591B"/>
+                  <a:srgbClr val="72591D"/>
                 </a:solidFill>
               </a:rPr>
               <a:t>함께 떠난 길</a:t>
@@ -4762,7 +4762,7 @@
             <a:avLst/>
           </a:prstGeom>
           <a:solidFill>
-            <a:srgbClr val="C6992F"/>
+            <a:srgbClr val="DFAD3A"/>
           </a:solidFill>
           <a:ln w="38100">
             <a:solidFill>
@@ -4808,7 +4808,7 @@
             <a:r>
               <a:rPr sz="1600" b="1" i="0">
                 <a:solidFill>
-                  <a:srgbClr val="C6992F"/>
+                  <a:srgbClr val="DFAD3A"/>
                 </a:solidFill>
               </a:rPr>
               <a:t>지금</a:t>
@@ -4846,7 +4846,7 @@
             <a:r>
               <a:rPr sz="1800" b="1" i="0">
                 <a:solidFill>
-                  <a:srgbClr val="74591B"/>
+                  <a:srgbClr val="72591D"/>
                 </a:solidFill>
               </a:rPr>
               <a:t>오늘의 우리</a:t>
@@ -4906,7 +4906,7 @@
     <p:bg>
       <p:bgPr>
         <a:solidFill>
-          <a:srgbClr val="FBF7EE"/>
+          <a:srgbClr val="FCF9F3"/>
         </a:solidFill>
         <a:effectLst/>
       </p:bgPr>
@@ -4935,7 +4935,7 @@
           <a:noFill/>
           <a:ln w="28575">
             <a:solidFill>
-              <a:srgbClr val="C6992F"/>
+              <a:srgbClr val="DFAD3A"/>
             </a:solidFill>
           </a:ln>
         </p:spPr>
@@ -4964,7 +4964,7 @@
           <a:noFill/>
           <a:ln w="9525">
             <a:solidFill>
-              <a:srgbClr val="F5E9CC"/>
+              <a:srgbClr val="F7EDD4"/>
             </a:solidFill>
           </a:ln>
         </p:spPr>
@@ -5006,7 +5006,7 @@
             <a:r>
               <a:rPr sz="3000" b="1" i="0">
                 <a:solidFill>
-                  <a:srgbClr val="74591B"/>
+                  <a:srgbClr val="72591D"/>
                 </a:solidFill>
               </a:rPr>
               <a:t>우리 가족의 약속</a:t>
@@ -5031,11 +5031,11 @@
             </a:avLst>
           </a:prstGeom>
           <a:solidFill>
-            <a:srgbClr val="FBF7EE"/>
+            <a:srgbClr val="FCF9F3"/>
           </a:solidFill>
           <a:ln w="12700">
             <a:solidFill>
-              <a:srgbClr val="F5E9CC"/>
+              <a:srgbClr val="F7EDD4"/>
             </a:solidFill>
           </a:ln>
         </p:spPr>
@@ -5062,7 +5062,7 @@
             <a:avLst/>
           </a:prstGeom>
           <a:solidFill>
-            <a:srgbClr val="C6992F"/>
+            <a:srgbClr val="DFAD3A"/>
           </a:solidFill>
           <a:ln>
             <a:noFill/>
@@ -5120,7 +5120,7 @@
             <a:r>
               <a:rPr sz="1800" b="1" i="0">
                 <a:solidFill>
-                  <a:srgbClr val="74591B"/>
+                  <a:srgbClr val="72591D"/>
                 </a:solidFill>
               </a:rPr>
               <a:t>약속 1</a:t>
@@ -5183,11 +5183,11 @@
             </a:avLst>
           </a:prstGeom>
           <a:solidFill>
-            <a:srgbClr val="FBF7EE"/>
+            <a:srgbClr val="FCF9F3"/>
           </a:solidFill>
           <a:ln w="12700">
             <a:solidFill>
-              <a:srgbClr val="F5E9CC"/>
+              <a:srgbClr val="F7EDD4"/>
             </a:solidFill>
           </a:ln>
         </p:spPr>
@@ -5214,7 +5214,7 @@
             <a:avLst/>
           </a:prstGeom>
           <a:solidFill>
-            <a:srgbClr val="C6992F"/>
+            <a:srgbClr val="DFAD3A"/>
           </a:solidFill>
           <a:ln>
             <a:noFill/>
@@ -5272,7 +5272,7 @@
             <a:r>
               <a:rPr sz="1800" b="1" i="0">
                 <a:solidFill>
-                  <a:srgbClr val="74591B"/>
+                  <a:srgbClr val="72591D"/>
                 </a:solidFill>
               </a:rPr>
               <a:t>약속 2</a:t>
@@ -5335,11 +5335,11 @@
             </a:avLst>
           </a:prstGeom>
           <a:solidFill>
-            <a:srgbClr val="FBF7EE"/>
+            <a:srgbClr val="FCF9F3"/>
           </a:solidFill>
           <a:ln w="12700">
             <a:solidFill>
-              <a:srgbClr val="F5E9CC"/>
+              <a:srgbClr val="F7EDD4"/>
             </a:solidFill>
           </a:ln>
         </p:spPr>
@@ -5366,7 +5366,7 @@
             <a:avLst/>
           </a:prstGeom>
           <a:solidFill>
-            <a:srgbClr val="C6992F"/>
+            <a:srgbClr val="DFAD3A"/>
           </a:solidFill>
           <a:ln>
             <a:noFill/>
@@ -5424,7 +5424,7 @@
             <a:r>
               <a:rPr sz="1800" b="1" i="0">
                 <a:solidFill>
-                  <a:srgbClr val="74591B"/>
+                  <a:srgbClr val="72591D"/>
                 </a:solidFill>
               </a:rPr>
               <a:t>약속 3</a:t>
@@ -5484,7 +5484,7 @@
     <p:bg>
       <p:bgPr>
         <a:solidFill>
-          <a:srgbClr val="FBF7EE"/>
+          <a:srgbClr val="FCF9F3"/>
         </a:solidFill>
         <a:effectLst/>
       </p:bgPr>
@@ -5513,7 +5513,7 @@
           <a:noFill/>
           <a:ln w="28575">
             <a:solidFill>
-              <a:srgbClr val="C6992F"/>
+              <a:srgbClr val="DFAD3A"/>
             </a:solidFill>
           </a:ln>
         </p:spPr>
@@ -5542,7 +5542,7 @@
           <a:noFill/>
           <a:ln w="9525">
             <a:solidFill>
-              <a:srgbClr val="F5E9CC"/>
+              <a:srgbClr val="F7EDD4"/>
             </a:solidFill>
           </a:ln>
         </p:spPr>
@@ -5584,7 +5584,7 @@
             <a:r>
               <a:rPr sz="3000" b="1" i="0">
                 <a:solidFill>
-                  <a:srgbClr val="74591B"/>
+                  <a:srgbClr val="72591D"/>
                 </a:solidFill>
               </a:rPr>
               <a:t>가족 사진</a:t>
@@ -5609,11 +5609,11 @@
             </a:avLst>
           </a:prstGeom>
           <a:solidFill>
-            <a:srgbClr val="F5E9CC"/>
+            <a:srgbClr val="F7EDD4"/>
           </a:solidFill>
           <a:ln w="19050">
             <a:solidFill>
-              <a:srgbClr val="C6992F"/>
+              <a:srgbClr val="DFAD3A"/>
             </a:solidFill>
             <a:prstDash val="dash"/>
           </a:ln>
@@ -5632,7 +5632,7 @@
             <a:r>
               <a:rPr sz="1200" b="0" i="0">
                 <a:solidFill>
-                  <a:srgbClr val="74591B"/>
+                  <a:srgbClr val="72591D"/>
                 </a:solidFill>
               </a:rPr>
               <a:t>사진 1</a:t>
@@ -5657,11 +5657,11 @@
             </a:avLst>
           </a:prstGeom>
           <a:solidFill>
-            <a:srgbClr val="F5E9CC"/>
+            <a:srgbClr val="F7EDD4"/>
           </a:solidFill>
           <a:ln w="19050">
             <a:solidFill>
-              <a:srgbClr val="C6992F"/>
+              <a:srgbClr val="DFAD3A"/>
             </a:solidFill>
             <a:prstDash val="dash"/>
           </a:ln>
@@ -5680,7 +5680,7 @@
             <a:r>
               <a:rPr sz="1200" b="0" i="0">
                 <a:solidFill>
-                  <a:srgbClr val="74591B"/>
+                  <a:srgbClr val="72591D"/>
                 </a:solidFill>
               </a:rPr>
               <a:t>사진 2</a:t>
@@ -5705,11 +5705,11 @@
             </a:avLst>
           </a:prstGeom>
           <a:solidFill>
-            <a:srgbClr val="F5E9CC"/>
+            <a:srgbClr val="F7EDD4"/>
           </a:solidFill>
           <a:ln w="19050">
             <a:solidFill>
-              <a:srgbClr val="C6992F"/>
+              <a:srgbClr val="DFAD3A"/>
             </a:solidFill>
             <a:prstDash val="dash"/>
           </a:ln>
@@ -5728,7 +5728,7 @@
             <a:r>
               <a:rPr sz="1200" b="0" i="0">
                 <a:solidFill>
-                  <a:srgbClr val="74591B"/>
+                  <a:srgbClr val="72591D"/>
                 </a:solidFill>
               </a:rPr>
               <a:t>사진 3</a:t>
@@ -5753,11 +5753,11 @@
             </a:avLst>
           </a:prstGeom>
           <a:solidFill>
-            <a:srgbClr val="F5E9CC"/>
+            <a:srgbClr val="F7EDD4"/>
           </a:solidFill>
           <a:ln w="19050">
             <a:solidFill>
-              <a:srgbClr val="C6992F"/>
+              <a:srgbClr val="DFAD3A"/>
             </a:solidFill>
             <a:prstDash val="dash"/>
           </a:ln>
@@ -5776,7 +5776,7 @@
             <a:r>
               <a:rPr sz="1200" b="0" i="0">
                 <a:solidFill>
-                  <a:srgbClr val="74591B"/>
+                  <a:srgbClr val="72591D"/>
                 </a:solidFill>
               </a:rPr>
               <a:t>사진 4</a:t>
@@ -5801,11 +5801,11 @@
             </a:avLst>
           </a:prstGeom>
           <a:solidFill>
-            <a:srgbClr val="F5E9CC"/>
+            <a:srgbClr val="F7EDD4"/>
           </a:solidFill>
           <a:ln w="19050">
             <a:solidFill>
-              <a:srgbClr val="C6992F"/>
+              <a:srgbClr val="DFAD3A"/>
             </a:solidFill>
             <a:prstDash val="dash"/>
           </a:ln>
@@ -5824,7 +5824,7 @@
             <a:r>
               <a:rPr sz="1200" b="0" i="0">
                 <a:solidFill>
-                  <a:srgbClr val="74591B"/>
+                  <a:srgbClr val="72591D"/>
                 </a:solidFill>
               </a:rPr>
               <a:t>사진 5</a:t>
@@ -5849,11 +5849,11 @@
             </a:avLst>
           </a:prstGeom>
           <a:solidFill>
-            <a:srgbClr val="F5E9CC"/>
+            <a:srgbClr val="F7EDD4"/>
           </a:solidFill>
           <a:ln w="19050">
             <a:solidFill>
-              <a:srgbClr val="C6992F"/>
+              <a:srgbClr val="DFAD3A"/>
             </a:solidFill>
             <a:prstDash val="dash"/>
           </a:ln>
@@ -5872,7 +5872,7 @@
             <a:r>
               <a:rPr sz="1200" b="0" i="0">
                 <a:solidFill>
-                  <a:srgbClr val="74591B"/>
+                  <a:srgbClr val="72591D"/>
                 </a:solidFill>
               </a:rPr>
               <a:t>사진 6</a:t>
@@ -5952,7 +5952,7 @@
             <a:r>
               <a:rPr sz="3600" b="1" i="0">
                 <a:solidFill>
-                  <a:srgbClr val="74591B"/>
+                  <a:srgbClr val="72591D"/>
                 </a:solidFill>
               </a:rPr>
               <a:t>우리 가족 소개를 마칩니다</a:t>
@@ -5990,7 +5990,7 @@
             <a:r>
               <a:rPr sz="1700" b="0" i="1">
                 <a:solidFill>
-                  <a:srgbClr val="74591B"/>
+                  <a:srgbClr val="72591D"/>
                 </a:solidFill>
               </a:rPr>
               <a:t>읽어 주셔서 고맙습니다</a:t>
@@ -6055,34 +6055,34 @@
         <a:sysClr val="window" lastClr="FFFFFF"/>
       </a:lt1>
       <a:dk2>
-        <a:srgbClr val="74591B"/>
+        <a:srgbClr val="72591D"/>
       </a:dk2>
       <a:lt2>
-        <a:srgbClr val="FBF7EE"/>
+        <a:srgbClr val="FCF9F3"/>
       </a:lt2>
       <a:accent1>
-        <a:srgbClr val="C6992F"/>
+        <a:srgbClr val="DFAD3A"/>
       </a:accent1>
       <a:accent2>
-        <a:srgbClr val="3B8091"/>
+        <a:srgbClr val="339941"/>
       </a:accent2>
       <a:accent3>
-        <a:srgbClr val="74591B"/>
+        <a:srgbClr val="72591D"/>
       </a:accent3>
       <a:accent4>
-        <a:srgbClr val="F5E9CC"/>
+        <a:srgbClr val="F7EDD4"/>
       </a:accent4>
       <a:accent5>
-        <a:srgbClr val="808C60"/>
+        <a:srgbClr val="89A33E"/>
       </a:accent5>
       <a:accent6>
-        <a:srgbClr val="AC9B76"/>
+        <a:srgbClr val="AA9B77"/>
       </a:accent6>
       <a:hlink>
-        <a:srgbClr val="C6992F"/>
+        <a:srgbClr val="DFAD3A"/>
       </a:hlink>
       <a:folHlink>
-        <a:srgbClr val="74591B"/>
+        <a:srgbClr val="72591D"/>
       </a:folHlink>
     </a:clrScheme>
     <a:fontScheme name="Office">
